--- a/dwi_pipeline/docs/presentations/preview/AutoHS/AutoHS.pptx
+++ b/dwi_pipeline/docs/presentations/preview/AutoHS/AutoHS.pptx
@@ -5438,7 +5438,7 @@
                 </a:solidFill>
                 <a:latin typeface="Arial"/>
               </a:rPr>
-              <a:t>T1w with left (blue) and right (orange) hippocampus overlays · AutoHS auto-classified as No HS</a:t>
+              <a:t>T1w with left (red) and right (blue) hippocampus overlays · AutoHS auto-classified as No HS</a:t>
             </a:r>
           </a:p>
         </p:txBody>
